--- a/design-system/standard/Mivada_Standard_Dark.pptx
+++ b/design-system/standard/Mivada_Standard_Dark.pptx
@@ -27797,11 +27797,11 @@
               <a:avLst/>
             </a:prstGeom>
             <a:solidFill>
-              <a:srgbClr val="FFFFFF"/>
+              <a:srgbClr val="141414"/>
             </a:solidFill>
             <a:ln w="12700">
               <a:solidFill>
-                <a:srgbClr val="E4E4E0"/>
+                <a:srgbClr val="3A3A3A"/>
               </a:solidFill>
             </a:ln>
             <a:effectLst/>
@@ -27863,7 +27863,7 @@
               <a:r>
                 <a:rPr lang="en-AU" sz="1500" b="1" i="0" spc="-15">
                   <a:solidFill>
-                    <a:srgbClr val="111111"/>
+                    <a:srgbClr val="FFFFFF"/>
                   </a:solidFill>
                   <a:latin typeface="Inter"/>
                 </a:rPr>
@@ -27906,7 +27906,7 @@
               <a:r>
                 <a:rPr lang="en-AU" sz="1050" b="0" i="0" spc="0">
                   <a:solidFill>
-                    <a:srgbClr val="323232"/>
+                    <a:srgbClr val="CFCFCF"/>
                   </a:solidFill>
                   <a:latin typeface="Inter"/>
                 </a:rPr>
@@ -27951,11 +27951,11 @@
               <a:avLst/>
             </a:prstGeom>
             <a:solidFill>
-              <a:srgbClr val="FFFFFF"/>
+              <a:srgbClr val="141414"/>
             </a:solidFill>
             <a:ln w="12700">
               <a:solidFill>
-                <a:srgbClr val="E4E4E0"/>
+                <a:srgbClr val="3A3A3A"/>
               </a:solidFill>
             </a:ln>
             <a:effectLst/>
@@ -28017,7 +28017,7 @@
               <a:r>
                 <a:rPr lang="en-AU" sz="1500" b="1" i="0" spc="-15">
                   <a:solidFill>
-                    <a:srgbClr val="111111"/>
+                    <a:srgbClr val="FFFFFF"/>
                   </a:solidFill>
                   <a:latin typeface="Inter"/>
                 </a:rPr>
@@ -28060,7 +28060,7 @@
               <a:r>
                 <a:rPr lang="en-AU" sz="1050" b="0" i="0" spc="0">
                   <a:solidFill>
-                    <a:srgbClr val="323232"/>
+                    <a:srgbClr val="CFCFCF"/>
                   </a:solidFill>
                   <a:latin typeface="Inter"/>
                 </a:rPr>
@@ -28486,7 +28486,7 @@
               <a:srgbClr val="EA493F"/>
             </a:solidFill>
             <a:ln>
-              <a:noFill/>
+              <a:solidFill/>
             </a:ln>
             <a:effectLst/>
           </p:spPr>

--- a/design-system/standard/Mivada_Standard_Dark.pptx
+++ b/design-system/standard/Mivada_Standard_Dark.pptx
@@ -30782,7 +30782,7 @@
         </p:nvSpPr>
         <p:spPr>
           <a:xfrm>
-            <a:off x="707120" y="926374"/>
+            <a:off x="841248" y="926374"/>
             <a:ext cx="10436047" cy="1005840"/>
           </a:xfrm>
           <a:prstGeom prst="rect">

--- a/design-system/standard/Mivada_Standard_Dark.pptx
+++ b/design-system/standard/Mivada_Standard_Dark.pptx
@@ -7954,50 +7954,6 @@
       </p:sp>
       <p:sp>
         <p:nvSpPr>
-          <p:cNvPr id="7" name="Rectangle 6"/>
-          <p:cNvSpPr/>
-          <p:nvPr/>
-        </p:nvSpPr>
-        <p:spPr>
-          <a:xfrm>
-            <a:off x="877824" y="2212848"/>
-            <a:ext cx="91440" cy="1078992"/>
-          </a:xfrm>
-          <a:prstGeom prst="rect">
-            <a:avLst/>
-          </a:prstGeom>
-          <a:solidFill>
-            <a:srgbClr val="EA493F"/>
-          </a:solidFill>
-          <a:ln>
-            <a:solidFill/>
-          </a:ln>
-          <a:effectLst/>
-        </p:spPr>
-        <p:style>
-          <a:lnRef idx="1">
-            <a:schemeClr val="accent1"/>
-          </a:lnRef>
-          <a:fillRef idx="3">
-            <a:schemeClr val="accent1"/>
-          </a:fillRef>
-          <a:effectRef idx="2">
-            <a:schemeClr val="accent1"/>
-          </a:effectRef>
-          <a:fontRef idx="minor">
-            <a:schemeClr val="lt1"/>
-          </a:fontRef>
-        </p:style>
-        <p:txBody>
-          <a:bodyPr rtlCol="0" anchor="ctr" lIns="0" rIns="0"/>
-          <a:lstStyle/>
-          <a:p>
-            <a:pPr algn="ctr"/>
-          </a:p>
-        </p:txBody>
-      </p:sp>
-      <p:sp>
-        <p:nvSpPr>
           <p:cNvPr id="8" name="TextBox 7"/>
           <p:cNvSpPr txBox="1"/>
           <p:nvPr/>
@@ -8153,50 +8109,6 @@
       </p:sp>
       <p:sp>
         <p:nvSpPr>
-          <p:cNvPr id="12" name="Rectangle 11"/>
-          <p:cNvSpPr/>
-          <p:nvPr/>
-        </p:nvSpPr>
-        <p:spPr>
-          <a:xfrm>
-            <a:off x="4480559" y="2212848"/>
-            <a:ext cx="91440" cy="1078992"/>
-          </a:xfrm>
-          <a:prstGeom prst="rect">
-            <a:avLst/>
-          </a:prstGeom>
-          <a:solidFill>
-            <a:srgbClr val="EA493F"/>
-          </a:solidFill>
-          <a:ln>
-            <a:solidFill/>
-          </a:ln>
-          <a:effectLst/>
-        </p:spPr>
-        <p:style>
-          <a:lnRef idx="1">
-            <a:schemeClr val="accent1"/>
-          </a:lnRef>
-          <a:fillRef idx="3">
-            <a:schemeClr val="accent1"/>
-          </a:fillRef>
-          <a:effectRef idx="2">
-            <a:schemeClr val="accent1"/>
-          </a:effectRef>
-          <a:fontRef idx="minor">
-            <a:schemeClr val="lt1"/>
-          </a:fontRef>
-        </p:style>
-        <p:txBody>
-          <a:bodyPr rtlCol="0" anchor="ctr" lIns="0" rIns="0"/>
-          <a:lstStyle/>
-          <a:p>
-            <a:pPr algn="ctr"/>
-          </a:p>
-        </p:txBody>
-      </p:sp>
-      <p:sp>
-        <p:nvSpPr>
           <p:cNvPr id="13" name="TextBox 12"/>
           <p:cNvSpPr txBox="1"/>
           <p:nvPr/>
@@ -8325,50 +8237,6 @@
             <a:solidFill>
               <a:srgbClr val="3A3A3A"/>
             </a:solidFill>
-          </a:ln>
-          <a:effectLst/>
-        </p:spPr>
-        <p:style>
-          <a:lnRef idx="1">
-            <a:schemeClr val="accent1"/>
-          </a:lnRef>
-          <a:fillRef idx="3">
-            <a:schemeClr val="accent1"/>
-          </a:fillRef>
-          <a:effectRef idx="2">
-            <a:schemeClr val="accent1"/>
-          </a:effectRef>
-          <a:fontRef idx="minor">
-            <a:schemeClr val="lt1"/>
-          </a:fontRef>
-        </p:style>
-        <p:txBody>
-          <a:bodyPr rtlCol="0" anchor="ctr" lIns="0" rIns="0"/>
-          <a:lstStyle/>
-          <a:p>
-            <a:pPr algn="ctr"/>
-          </a:p>
-        </p:txBody>
-      </p:sp>
-      <p:sp>
-        <p:nvSpPr>
-          <p:cNvPr id="17" name="Rectangle 16"/>
-          <p:cNvSpPr/>
-          <p:nvPr/>
-        </p:nvSpPr>
-        <p:spPr>
-          <a:xfrm>
-            <a:off x="8083296" y="2212848"/>
-            <a:ext cx="91440" cy="1078992"/>
-          </a:xfrm>
-          <a:prstGeom prst="rect">
-            <a:avLst/>
-          </a:prstGeom>
-          <a:solidFill>
-            <a:srgbClr val="EA493F"/>
-          </a:solidFill>
-          <a:ln>
-            <a:solidFill/>
           </a:ln>
           <a:effectLst/>
         </p:spPr>
@@ -9608,50 +9476,6 @@
       </p:sp>
       <p:sp>
         <p:nvSpPr>
-          <p:cNvPr id="9" name="Rectangle 8"/>
-          <p:cNvSpPr/>
-          <p:nvPr/>
-        </p:nvSpPr>
-        <p:spPr>
-          <a:xfrm>
-            <a:off x="877824" y="2670048"/>
-            <a:ext cx="54864" cy="420624"/>
-          </a:xfrm>
-          <a:prstGeom prst="rect">
-            <a:avLst/>
-          </a:prstGeom>
-          <a:solidFill>
-            <a:srgbClr val="EA493F"/>
-          </a:solidFill>
-          <a:ln>
-            <a:solidFill/>
-          </a:ln>
-          <a:effectLst/>
-        </p:spPr>
-        <p:style>
-          <a:lnRef idx="1">
-            <a:schemeClr val="accent1"/>
-          </a:lnRef>
-          <a:fillRef idx="3">
-            <a:schemeClr val="accent1"/>
-          </a:fillRef>
-          <a:effectRef idx="2">
-            <a:schemeClr val="accent1"/>
-          </a:effectRef>
-          <a:fontRef idx="minor">
-            <a:schemeClr val="lt1"/>
-          </a:fontRef>
-        </p:style>
-        <p:txBody>
-          <a:bodyPr rtlCol="0" anchor="ctr" lIns="0" rIns="0"/>
-          <a:lstStyle/>
-          <a:p>
-            <a:pPr algn="ctr"/>
-          </a:p>
-        </p:txBody>
-      </p:sp>
-      <p:sp>
-        <p:nvSpPr>
           <p:cNvPr id="10" name="TextBox 9"/>
           <p:cNvSpPr txBox="1"/>
           <p:nvPr/>
@@ -9733,50 +9557,6 @@
       </p:sp>
       <p:sp>
         <p:nvSpPr>
-          <p:cNvPr id="12" name="Rectangle 11"/>
-          <p:cNvSpPr/>
-          <p:nvPr/>
-        </p:nvSpPr>
-        <p:spPr>
-          <a:xfrm>
-            <a:off x="3465576" y="2670048"/>
-            <a:ext cx="54864" cy="420624"/>
-          </a:xfrm>
-          <a:prstGeom prst="rect">
-            <a:avLst/>
-          </a:prstGeom>
-          <a:solidFill>
-            <a:srgbClr val="EA493F"/>
-          </a:solidFill>
-          <a:ln>
-            <a:solidFill/>
-          </a:ln>
-          <a:effectLst/>
-        </p:spPr>
-        <p:style>
-          <a:lnRef idx="1">
-            <a:schemeClr val="accent1"/>
-          </a:lnRef>
-          <a:fillRef idx="3">
-            <a:schemeClr val="accent1"/>
-          </a:fillRef>
-          <a:effectRef idx="2">
-            <a:schemeClr val="accent1"/>
-          </a:effectRef>
-          <a:fontRef idx="minor">
-            <a:schemeClr val="lt1"/>
-          </a:fontRef>
-        </p:style>
-        <p:txBody>
-          <a:bodyPr rtlCol="0" anchor="ctr" lIns="0" rIns="0"/>
-          <a:lstStyle/>
-          <a:p>
-            <a:pPr algn="ctr"/>
-          </a:p>
-        </p:txBody>
-      </p:sp>
-      <p:sp>
-        <p:nvSpPr>
           <p:cNvPr id="13" name="TextBox 12"/>
           <p:cNvSpPr txBox="1"/>
           <p:nvPr/>
@@ -9858,50 +9638,6 @@
       </p:sp>
       <p:sp>
         <p:nvSpPr>
-          <p:cNvPr id="15" name="Rectangle 14"/>
-          <p:cNvSpPr/>
-          <p:nvPr/>
-        </p:nvSpPr>
-        <p:spPr>
-          <a:xfrm>
-            <a:off x="877824" y="3168396"/>
-            <a:ext cx="54864" cy="420624"/>
-          </a:xfrm>
-          <a:prstGeom prst="rect">
-            <a:avLst/>
-          </a:prstGeom>
-          <a:solidFill>
-            <a:srgbClr val="EA493F"/>
-          </a:solidFill>
-          <a:ln>
-            <a:solidFill/>
-          </a:ln>
-          <a:effectLst/>
-        </p:spPr>
-        <p:style>
-          <a:lnRef idx="1">
-            <a:schemeClr val="accent1"/>
-          </a:lnRef>
-          <a:fillRef idx="3">
-            <a:schemeClr val="accent1"/>
-          </a:fillRef>
-          <a:effectRef idx="2">
-            <a:schemeClr val="accent1"/>
-          </a:effectRef>
-          <a:fontRef idx="minor">
-            <a:schemeClr val="lt1"/>
-          </a:fontRef>
-        </p:style>
-        <p:txBody>
-          <a:bodyPr rtlCol="0" anchor="ctr" lIns="0" rIns="0"/>
-          <a:lstStyle/>
-          <a:p>
-            <a:pPr algn="ctr"/>
-          </a:p>
-        </p:txBody>
-      </p:sp>
-      <p:sp>
-        <p:nvSpPr>
           <p:cNvPr id="16" name="TextBox 15"/>
           <p:cNvSpPr txBox="1"/>
           <p:nvPr/>
@@ -9983,50 +9719,6 @@
       </p:sp>
       <p:sp>
         <p:nvSpPr>
-          <p:cNvPr id="18" name="Rectangle 17"/>
-          <p:cNvSpPr/>
-          <p:nvPr/>
-        </p:nvSpPr>
-        <p:spPr>
-          <a:xfrm>
-            <a:off x="3465576" y="3168396"/>
-            <a:ext cx="54864" cy="420624"/>
-          </a:xfrm>
-          <a:prstGeom prst="rect">
-            <a:avLst/>
-          </a:prstGeom>
-          <a:solidFill>
-            <a:srgbClr val="EA493F"/>
-          </a:solidFill>
-          <a:ln>
-            <a:solidFill/>
-          </a:ln>
-          <a:effectLst/>
-        </p:spPr>
-        <p:style>
-          <a:lnRef idx="1">
-            <a:schemeClr val="accent1"/>
-          </a:lnRef>
-          <a:fillRef idx="3">
-            <a:schemeClr val="accent1"/>
-          </a:fillRef>
-          <a:effectRef idx="2">
-            <a:schemeClr val="accent1"/>
-          </a:effectRef>
-          <a:fontRef idx="minor">
-            <a:schemeClr val="lt1"/>
-          </a:fontRef>
-        </p:style>
-        <p:txBody>
-          <a:bodyPr rtlCol="0" anchor="ctr" lIns="0" rIns="0"/>
-          <a:lstStyle/>
-          <a:p>
-            <a:pPr algn="ctr"/>
-          </a:p>
-        </p:txBody>
-      </p:sp>
-      <p:sp>
-        <p:nvSpPr>
           <p:cNvPr id="19" name="TextBox 18"/>
           <p:cNvSpPr txBox="1"/>
           <p:nvPr/>
@@ -10108,50 +9800,6 @@
       </p:sp>
       <p:sp>
         <p:nvSpPr>
-          <p:cNvPr id="21" name="Rectangle 20"/>
-          <p:cNvSpPr/>
-          <p:nvPr/>
-        </p:nvSpPr>
-        <p:spPr>
-          <a:xfrm>
-            <a:off x="877824" y="3666744"/>
-            <a:ext cx="54864" cy="420624"/>
-          </a:xfrm>
-          <a:prstGeom prst="rect">
-            <a:avLst/>
-          </a:prstGeom>
-          <a:solidFill>
-            <a:srgbClr val="EA493F"/>
-          </a:solidFill>
-          <a:ln>
-            <a:solidFill/>
-          </a:ln>
-          <a:effectLst/>
-        </p:spPr>
-        <p:style>
-          <a:lnRef idx="1">
-            <a:schemeClr val="accent1"/>
-          </a:lnRef>
-          <a:fillRef idx="3">
-            <a:schemeClr val="accent1"/>
-          </a:fillRef>
-          <a:effectRef idx="2">
-            <a:schemeClr val="accent1"/>
-          </a:effectRef>
-          <a:fontRef idx="minor">
-            <a:schemeClr val="lt1"/>
-          </a:fontRef>
-        </p:style>
-        <p:txBody>
-          <a:bodyPr rtlCol="0" anchor="ctr" lIns="0" rIns="0"/>
-          <a:lstStyle/>
-          <a:p>
-            <a:pPr algn="ctr"/>
-          </a:p>
-        </p:txBody>
-      </p:sp>
-      <p:sp>
-        <p:nvSpPr>
           <p:cNvPr id="22" name="TextBox 21"/>
           <p:cNvSpPr txBox="1"/>
           <p:nvPr/>
@@ -10233,50 +9881,6 @@
       </p:sp>
       <p:sp>
         <p:nvSpPr>
-          <p:cNvPr id="24" name="Rectangle 23"/>
-          <p:cNvSpPr/>
-          <p:nvPr/>
-        </p:nvSpPr>
-        <p:spPr>
-          <a:xfrm>
-            <a:off x="3465576" y="3666744"/>
-            <a:ext cx="54864" cy="420624"/>
-          </a:xfrm>
-          <a:prstGeom prst="rect">
-            <a:avLst/>
-          </a:prstGeom>
-          <a:solidFill>
-            <a:srgbClr val="EA493F"/>
-          </a:solidFill>
-          <a:ln>
-            <a:solidFill/>
-          </a:ln>
-          <a:effectLst/>
-        </p:spPr>
-        <p:style>
-          <a:lnRef idx="1">
-            <a:schemeClr val="accent1"/>
-          </a:lnRef>
-          <a:fillRef idx="3">
-            <a:schemeClr val="accent1"/>
-          </a:fillRef>
-          <a:effectRef idx="2">
-            <a:schemeClr val="accent1"/>
-          </a:effectRef>
-          <a:fontRef idx="minor">
-            <a:schemeClr val="lt1"/>
-          </a:fontRef>
-        </p:style>
-        <p:txBody>
-          <a:bodyPr rtlCol="0" anchor="ctr" lIns="0" rIns="0"/>
-          <a:lstStyle/>
-          <a:p>
-            <a:pPr algn="ctr"/>
-          </a:p>
-        </p:txBody>
-      </p:sp>
-      <p:sp>
-        <p:nvSpPr>
           <p:cNvPr id="25" name="TextBox 24"/>
           <p:cNvSpPr txBox="1"/>
           <p:nvPr/>
@@ -10358,50 +9962,6 @@
       </p:sp>
       <p:sp>
         <p:nvSpPr>
-          <p:cNvPr id="27" name="Rectangle 26"/>
-          <p:cNvSpPr/>
-          <p:nvPr/>
-        </p:nvSpPr>
-        <p:spPr>
-          <a:xfrm>
-            <a:off x="877824" y="4165091"/>
-            <a:ext cx="54864" cy="420624"/>
-          </a:xfrm>
-          <a:prstGeom prst="rect">
-            <a:avLst/>
-          </a:prstGeom>
-          <a:solidFill>
-            <a:srgbClr val="EA493F"/>
-          </a:solidFill>
-          <a:ln>
-            <a:solidFill/>
-          </a:ln>
-          <a:effectLst/>
-        </p:spPr>
-        <p:style>
-          <a:lnRef idx="1">
-            <a:schemeClr val="accent1"/>
-          </a:lnRef>
-          <a:fillRef idx="3">
-            <a:schemeClr val="accent1"/>
-          </a:fillRef>
-          <a:effectRef idx="2">
-            <a:schemeClr val="accent1"/>
-          </a:effectRef>
-          <a:fontRef idx="minor">
-            <a:schemeClr val="lt1"/>
-          </a:fontRef>
-        </p:style>
-        <p:txBody>
-          <a:bodyPr rtlCol="0" anchor="ctr" lIns="0" rIns="0"/>
-          <a:lstStyle/>
-          <a:p>
-            <a:pPr algn="ctr"/>
-          </a:p>
-        </p:txBody>
-      </p:sp>
-      <p:sp>
-        <p:nvSpPr>
           <p:cNvPr id="28" name="TextBox 27"/>
           <p:cNvSpPr txBox="1"/>
           <p:nvPr/>
@@ -10483,50 +10043,6 @@
       </p:sp>
       <p:sp>
         <p:nvSpPr>
-          <p:cNvPr id="30" name="Rectangle 29"/>
-          <p:cNvSpPr/>
-          <p:nvPr/>
-        </p:nvSpPr>
-        <p:spPr>
-          <a:xfrm>
-            <a:off x="3465576" y="4165091"/>
-            <a:ext cx="54864" cy="420624"/>
-          </a:xfrm>
-          <a:prstGeom prst="rect">
-            <a:avLst/>
-          </a:prstGeom>
-          <a:solidFill>
-            <a:srgbClr val="EA493F"/>
-          </a:solidFill>
-          <a:ln>
-            <a:solidFill/>
-          </a:ln>
-          <a:effectLst/>
-        </p:spPr>
-        <p:style>
-          <a:lnRef idx="1">
-            <a:schemeClr val="accent1"/>
-          </a:lnRef>
-          <a:fillRef idx="3">
-            <a:schemeClr val="accent1"/>
-          </a:fillRef>
-          <a:effectRef idx="2">
-            <a:schemeClr val="accent1"/>
-          </a:effectRef>
-          <a:fontRef idx="minor">
-            <a:schemeClr val="lt1"/>
-          </a:fontRef>
-        </p:style>
-        <p:txBody>
-          <a:bodyPr rtlCol="0" anchor="ctr" lIns="0" rIns="0"/>
-          <a:lstStyle/>
-          <a:p>
-            <a:pPr algn="ctr"/>
-          </a:p>
-        </p:txBody>
-      </p:sp>
-      <p:sp>
-        <p:nvSpPr>
           <p:cNvPr id="31" name="TextBox 30"/>
           <p:cNvSpPr txBox="1"/>
           <p:nvPr/>
@@ -10608,50 +10124,6 @@
       </p:sp>
       <p:sp>
         <p:nvSpPr>
-          <p:cNvPr id="33" name="Rectangle 32"/>
-          <p:cNvSpPr/>
-          <p:nvPr/>
-        </p:nvSpPr>
-        <p:spPr>
-          <a:xfrm>
-            <a:off x="877824" y="4663440"/>
-            <a:ext cx="54864" cy="420624"/>
-          </a:xfrm>
-          <a:prstGeom prst="rect">
-            <a:avLst/>
-          </a:prstGeom>
-          <a:solidFill>
-            <a:srgbClr val="EA493F"/>
-          </a:solidFill>
-          <a:ln>
-            <a:solidFill/>
-          </a:ln>
-          <a:effectLst/>
-        </p:spPr>
-        <p:style>
-          <a:lnRef idx="1">
-            <a:schemeClr val="accent1"/>
-          </a:lnRef>
-          <a:fillRef idx="3">
-            <a:schemeClr val="accent1"/>
-          </a:fillRef>
-          <a:effectRef idx="2">
-            <a:schemeClr val="accent1"/>
-          </a:effectRef>
-          <a:fontRef idx="minor">
-            <a:schemeClr val="lt1"/>
-          </a:fontRef>
-        </p:style>
-        <p:txBody>
-          <a:bodyPr rtlCol="0" anchor="ctr" lIns="0" rIns="0"/>
-          <a:lstStyle/>
-          <a:p>
-            <a:pPr algn="ctr"/>
-          </a:p>
-        </p:txBody>
-      </p:sp>
-      <p:sp>
-        <p:nvSpPr>
           <p:cNvPr id="34" name="TextBox 33"/>
           <p:cNvSpPr txBox="1"/>
           <p:nvPr/>
@@ -10733,50 +10205,6 @@
       </p:sp>
       <p:sp>
         <p:nvSpPr>
-          <p:cNvPr id="36" name="Rectangle 35"/>
-          <p:cNvSpPr/>
-          <p:nvPr/>
-        </p:nvSpPr>
-        <p:spPr>
-          <a:xfrm>
-            <a:off x="3465576" y="4663440"/>
-            <a:ext cx="54864" cy="420624"/>
-          </a:xfrm>
-          <a:prstGeom prst="rect">
-            <a:avLst/>
-          </a:prstGeom>
-          <a:solidFill>
-            <a:srgbClr val="EA493F"/>
-          </a:solidFill>
-          <a:ln>
-            <a:solidFill/>
-          </a:ln>
-          <a:effectLst/>
-        </p:spPr>
-        <p:style>
-          <a:lnRef idx="1">
-            <a:schemeClr val="accent1"/>
-          </a:lnRef>
-          <a:fillRef idx="3">
-            <a:schemeClr val="accent1"/>
-          </a:fillRef>
-          <a:effectRef idx="2">
-            <a:schemeClr val="accent1"/>
-          </a:effectRef>
-          <a:fontRef idx="minor">
-            <a:schemeClr val="lt1"/>
-          </a:fontRef>
-        </p:style>
-        <p:txBody>
-          <a:bodyPr rtlCol="0" anchor="ctr" lIns="0" rIns="0"/>
-          <a:lstStyle/>
-          <a:p>
-            <a:pPr algn="ctr"/>
-          </a:p>
-        </p:txBody>
-      </p:sp>
-      <p:sp>
-        <p:nvSpPr>
           <p:cNvPr id="37" name="TextBox 36"/>
           <p:cNvSpPr txBox="1"/>
           <p:nvPr/>
@@ -10858,50 +10286,6 @@
       </p:sp>
       <p:sp>
         <p:nvSpPr>
-          <p:cNvPr id="39" name="Rectangle 38"/>
-          <p:cNvSpPr/>
-          <p:nvPr/>
-        </p:nvSpPr>
-        <p:spPr>
-          <a:xfrm>
-            <a:off x="877824" y="5161788"/>
-            <a:ext cx="54864" cy="420624"/>
-          </a:xfrm>
-          <a:prstGeom prst="rect">
-            <a:avLst/>
-          </a:prstGeom>
-          <a:solidFill>
-            <a:srgbClr val="EA493F"/>
-          </a:solidFill>
-          <a:ln>
-            <a:solidFill/>
-          </a:ln>
-          <a:effectLst/>
-        </p:spPr>
-        <p:style>
-          <a:lnRef idx="1">
-            <a:schemeClr val="accent1"/>
-          </a:lnRef>
-          <a:fillRef idx="3">
-            <a:schemeClr val="accent1"/>
-          </a:fillRef>
-          <a:effectRef idx="2">
-            <a:schemeClr val="accent1"/>
-          </a:effectRef>
-          <a:fontRef idx="minor">
-            <a:schemeClr val="lt1"/>
-          </a:fontRef>
-        </p:style>
-        <p:txBody>
-          <a:bodyPr rtlCol="0" anchor="ctr" lIns="0" rIns="0"/>
-          <a:lstStyle/>
-          <a:p>
-            <a:pPr algn="ctr"/>
-          </a:p>
-        </p:txBody>
-      </p:sp>
-      <p:sp>
-        <p:nvSpPr>
           <p:cNvPr id="40" name="TextBox 39"/>
           <p:cNvSpPr txBox="1"/>
           <p:nvPr/>
@@ -10983,50 +10367,6 @@
       </p:sp>
       <p:sp>
         <p:nvSpPr>
-          <p:cNvPr id="42" name="Rectangle 41"/>
-          <p:cNvSpPr/>
-          <p:nvPr/>
-        </p:nvSpPr>
-        <p:spPr>
-          <a:xfrm>
-            <a:off x="3465576" y="5161788"/>
-            <a:ext cx="54864" cy="420624"/>
-          </a:xfrm>
-          <a:prstGeom prst="rect">
-            <a:avLst/>
-          </a:prstGeom>
-          <a:solidFill>
-            <a:srgbClr val="EA493F"/>
-          </a:solidFill>
-          <a:ln>
-            <a:solidFill/>
-          </a:ln>
-          <a:effectLst/>
-        </p:spPr>
-        <p:style>
-          <a:lnRef idx="1">
-            <a:schemeClr val="accent1"/>
-          </a:lnRef>
-          <a:fillRef idx="3">
-            <a:schemeClr val="accent1"/>
-          </a:fillRef>
-          <a:effectRef idx="2">
-            <a:schemeClr val="accent1"/>
-          </a:effectRef>
-          <a:fontRef idx="minor">
-            <a:schemeClr val="lt1"/>
-          </a:fontRef>
-        </p:style>
-        <p:txBody>
-          <a:bodyPr rtlCol="0" anchor="ctr" lIns="0" rIns="0"/>
-          <a:lstStyle/>
-          <a:p>
-            <a:pPr algn="ctr"/>
-          </a:p>
-        </p:txBody>
-      </p:sp>
-      <p:sp>
-        <p:nvSpPr>
           <p:cNvPr id="43" name="TextBox 42"/>
           <p:cNvSpPr txBox="1"/>
           <p:nvPr/>
@@ -11187,50 +10527,6 @@
       </p:sp>
       <p:sp>
         <p:nvSpPr>
-          <p:cNvPr id="47" name="Rectangle 46"/>
-          <p:cNvSpPr/>
-          <p:nvPr/>
-        </p:nvSpPr>
-        <p:spPr>
-          <a:xfrm>
-            <a:off x="6291072" y="2670048"/>
-            <a:ext cx="54864" cy="420624"/>
-          </a:xfrm>
-          <a:prstGeom prst="rect">
-            <a:avLst/>
-          </a:prstGeom>
-          <a:solidFill>
-            <a:srgbClr val="EA493F"/>
-          </a:solidFill>
-          <a:ln>
-            <a:solidFill/>
-          </a:ln>
-          <a:effectLst/>
-        </p:spPr>
-        <p:style>
-          <a:lnRef idx="1">
-            <a:schemeClr val="accent1"/>
-          </a:lnRef>
-          <a:fillRef idx="3">
-            <a:schemeClr val="accent1"/>
-          </a:fillRef>
-          <a:effectRef idx="2">
-            <a:schemeClr val="accent1"/>
-          </a:effectRef>
-          <a:fontRef idx="minor">
-            <a:schemeClr val="lt1"/>
-          </a:fontRef>
-        </p:style>
-        <p:txBody>
-          <a:bodyPr rtlCol="0" anchor="ctr" lIns="0" rIns="0"/>
-          <a:lstStyle/>
-          <a:p>
-            <a:pPr algn="ctr"/>
-          </a:p>
-        </p:txBody>
-      </p:sp>
-      <p:sp>
-        <p:nvSpPr>
           <p:cNvPr id="48" name="TextBox 47"/>
           <p:cNvSpPr txBox="1"/>
           <p:nvPr/>
@@ -11312,50 +10608,6 @@
       </p:sp>
       <p:sp>
         <p:nvSpPr>
-          <p:cNvPr id="50" name="Rectangle 49"/>
-          <p:cNvSpPr/>
-          <p:nvPr/>
-        </p:nvSpPr>
-        <p:spPr>
-          <a:xfrm>
-            <a:off x="8878824" y="2670048"/>
-            <a:ext cx="54864" cy="420624"/>
-          </a:xfrm>
-          <a:prstGeom prst="rect">
-            <a:avLst/>
-          </a:prstGeom>
-          <a:solidFill>
-            <a:srgbClr val="EA493F"/>
-          </a:solidFill>
-          <a:ln>
-            <a:solidFill/>
-          </a:ln>
-          <a:effectLst/>
-        </p:spPr>
-        <p:style>
-          <a:lnRef idx="1">
-            <a:schemeClr val="accent1"/>
-          </a:lnRef>
-          <a:fillRef idx="3">
-            <a:schemeClr val="accent1"/>
-          </a:fillRef>
-          <a:effectRef idx="2">
-            <a:schemeClr val="accent1"/>
-          </a:effectRef>
-          <a:fontRef idx="minor">
-            <a:schemeClr val="lt1"/>
-          </a:fontRef>
-        </p:style>
-        <p:txBody>
-          <a:bodyPr rtlCol="0" anchor="ctr" lIns="0" rIns="0"/>
-          <a:lstStyle/>
-          <a:p>
-            <a:pPr algn="ctr"/>
-          </a:p>
-        </p:txBody>
-      </p:sp>
-      <p:sp>
-        <p:nvSpPr>
           <p:cNvPr id="51" name="TextBox 50"/>
           <p:cNvSpPr txBox="1"/>
           <p:nvPr/>
@@ -11437,50 +10689,6 @@
       </p:sp>
       <p:sp>
         <p:nvSpPr>
-          <p:cNvPr id="53" name="Rectangle 52"/>
-          <p:cNvSpPr/>
-          <p:nvPr/>
-        </p:nvSpPr>
-        <p:spPr>
-          <a:xfrm>
-            <a:off x="6291072" y="3168396"/>
-            <a:ext cx="54864" cy="420624"/>
-          </a:xfrm>
-          <a:prstGeom prst="rect">
-            <a:avLst/>
-          </a:prstGeom>
-          <a:solidFill>
-            <a:srgbClr val="EA493F"/>
-          </a:solidFill>
-          <a:ln>
-            <a:solidFill/>
-          </a:ln>
-          <a:effectLst/>
-        </p:spPr>
-        <p:style>
-          <a:lnRef idx="1">
-            <a:schemeClr val="accent1"/>
-          </a:lnRef>
-          <a:fillRef idx="3">
-            <a:schemeClr val="accent1"/>
-          </a:fillRef>
-          <a:effectRef idx="2">
-            <a:schemeClr val="accent1"/>
-          </a:effectRef>
-          <a:fontRef idx="minor">
-            <a:schemeClr val="lt1"/>
-          </a:fontRef>
-        </p:style>
-        <p:txBody>
-          <a:bodyPr rtlCol="0" anchor="ctr" lIns="0" rIns="0"/>
-          <a:lstStyle/>
-          <a:p>
-            <a:pPr algn="ctr"/>
-          </a:p>
-        </p:txBody>
-      </p:sp>
-      <p:sp>
-        <p:nvSpPr>
           <p:cNvPr id="54" name="TextBox 53"/>
           <p:cNvSpPr txBox="1"/>
           <p:nvPr/>
@@ -11562,50 +10770,6 @@
       </p:sp>
       <p:sp>
         <p:nvSpPr>
-          <p:cNvPr id="56" name="Rectangle 55"/>
-          <p:cNvSpPr/>
-          <p:nvPr/>
-        </p:nvSpPr>
-        <p:spPr>
-          <a:xfrm>
-            <a:off x="8878824" y="3168396"/>
-            <a:ext cx="54864" cy="420624"/>
-          </a:xfrm>
-          <a:prstGeom prst="rect">
-            <a:avLst/>
-          </a:prstGeom>
-          <a:solidFill>
-            <a:srgbClr val="EA493F"/>
-          </a:solidFill>
-          <a:ln>
-            <a:solidFill/>
-          </a:ln>
-          <a:effectLst/>
-        </p:spPr>
-        <p:style>
-          <a:lnRef idx="1">
-            <a:schemeClr val="accent1"/>
-          </a:lnRef>
-          <a:fillRef idx="3">
-            <a:schemeClr val="accent1"/>
-          </a:fillRef>
-          <a:effectRef idx="2">
-            <a:schemeClr val="accent1"/>
-          </a:effectRef>
-          <a:fontRef idx="minor">
-            <a:schemeClr val="lt1"/>
-          </a:fontRef>
-        </p:style>
-        <p:txBody>
-          <a:bodyPr rtlCol="0" anchor="ctr" lIns="0" rIns="0"/>
-          <a:lstStyle/>
-          <a:p>
-            <a:pPr algn="ctr"/>
-          </a:p>
-        </p:txBody>
-      </p:sp>
-      <p:sp>
-        <p:nvSpPr>
           <p:cNvPr id="57" name="TextBox 56"/>
           <p:cNvSpPr txBox="1"/>
           <p:nvPr/>
@@ -11687,50 +10851,6 @@
       </p:sp>
       <p:sp>
         <p:nvSpPr>
-          <p:cNvPr id="59" name="Rectangle 58"/>
-          <p:cNvSpPr/>
-          <p:nvPr/>
-        </p:nvSpPr>
-        <p:spPr>
-          <a:xfrm>
-            <a:off x="6291072" y="3666744"/>
-            <a:ext cx="54864" cy="420624"/>
-          </a:xfrm>
-          <a:prstGeom prst="rect">
-            <a:avLst/>
-          </a:prstGeom>
-          <a:solidFill>
-            <a:srgbClr val="EA493F"/>
-          </a:solidFill>
-          <a:ln>
-            <a:solidFill/>
-          </a:ln>
-          <a:effectLst/>
-        </p:spPr>
-        <p:style>
-          <a:lnRef idx="1">
-            <a:schemeClr val="accent1"/>
-          </a:lnRef>
-          <a:fillRef idx="3">
-            <a:schemeClr val="accent1"/>
-          </a:fillRef>
-          <a:effectRef idx="2">
-            <a:schemeClr val="accent1"/>
-          </a:effectRef>
-          <a:fontRef idx="minor">
-            <a:schemeClr val="lt1"/>
-          </a:fontRef>
-        </p:style>
-        <p:txBody>
-          <a:bodyPr rtlCol="0" anchor="ctr" lIns="0" rIns="0"/>
-          <a:lstStyle/>
-          <a:p>
-            <a:pPr algn="ctr"/>
-          </a:p>
-        </p:txBody>
-      </p:sp>
-      <p:sp>
-        <p:nvSpPr>
           <p:cNvPr id="60" name="TextBox 59"/>
           <p:cNvSpPr txBox="1"/>
           <p:nvPr/>
@@ -11812,50 +10932,6 @@
       </p:sp>
       <p:sp>
         <p:nvSpPr>
-          <p:cNvPr id="62" name="Rectangle 61"/>
-          <p:cNvSpPr/>
-          <p:nvPr/>
-        </p:nvSpPr>
-        <p:spPr>
-          <a:xfrm>
-            <a:off x="8878824" y="3666744"/>
-            <a:ext cx="54864" cy="420624"/>
-          </a:xfrm>
-          <a:prstGeom prst="rect">
-            <a:avLst/>
-          </a:prstGeom>
-          <a:solidFill>
-            <a:srgbClr val="EA493F"/>
-          </a:solidFill>
-          <a:ln>
-            <a:solidFill/>
-          </a:ln>
-          <a:effectLst/>
-        </p:spPr>
-        <p:style>
-          <a:lnRef idx="1">
-            <a:schemeClr val="accent1"/>
-          </a:lnRef>
-          <a:fillRef idx="3">
-            <a:schemeClr val="accent1"/>
-          </a:fillRef>
-          <a:effectRef idx="2">
-            <a:schemeClr val="accent1"/>
-          </a:effectRef>
-          <a:fontRef idx="minor">
-            <a:schemeClr val="lt1"/>
-          </a:fontRef>
-        </p:style>
-        <p:txBody>
-          <a:bodyPr rtlCol="0" anchor="ctr" lIns="0" rIns="0"/>
-          <a:lstStyle/>
-          <a:p>
-            <a:pPr algn="ctr"/>
-          </a:p>
-        </p:txBody>
-      </p:sp>
-      <p:sp>
-        <p:nvSpPr>
           <p:cNvPr id="63" name="TextBox 62"/>
           <p:cNvSpPr txBox="1"/>
           <p:nvPr/>
@@ -11937,50 +11013,6 @@
       </p:sp>
       <p:sp>
         <p:nvSpPr>
-          <p:cNvPr id="65" name="Rectangle 64"/>
-          <p:cNvSpPr/>
-          <p:nvPr/>
-        </p:nvSpPr>
-        <p:spPr>
-          <a:xfrm>
-            <a:off x="6291072" y="4165091"/>
-            <a:ext cx="54864" cy="420624"/>
-          </a:xfrm>
-          <a:prstGeom prst="rect">
-            <a:avLst/>
-          </a:prstGeom>
-          <a:solidFill>
-            <a:srgbClr val="EA493F"/>
-          </a:solidFill>
-          <a:ln>
-            <a:solidFill/>
-          </a:ln>
-          <a:effectLst/>
-        </p:spPr>
-        <p:style>
-          <a:lnRef idx="1">
-            <a:schemeClr val="accent1"/>
-          </a:lnRef>
-          <a:fillRef idx="3">
-            <a:schemeClr val="accent1"/>
-          </a:fillRef>
-          <a:effectRef idx="2">
-            <a:schemeClr val="accent1"/>
-          </a:effectRef>
-          <a:fontRef idx="minor">
-            <a:schemeClr val="lt1"/>
-          </a:fontRef>
-        </p:style>
-        <p:txBody>
-          <a:bodyPr rtlCol="0" anchor="ctr" lIns="0" rIns="0"/>
-          <a:lstStyle/>
-          <a:p>
-            <a:pPr algn="ctr"/>
-          </a:p>
-        </p:txBody>
-      </p:sp>
-      <p:sp>
-        <p:nvSpPr>
           <p:cNvPr id="66" name="TextBox 65"/>
           <p:cNvSpPr txBox="1"/>
           <p:nvPr/>
@@ -12062,50 +11094,6 @@
       </p:sp>
       <p:sp>
         <p:nvSpPr>
-          <p:cNvPr id="68" name="Rectangle 67"/>
-          <p:cNvSpPr/>
-          <p:nvPr/>
-        </p:nvSpPr>
-        <p:spPr>
-          <a:xfrm>
-            <a:off x="8878824" y="4165091"/>
-            <a:ext cx="54864" cy="420624"/>
-          </a:xfrm>
-          <a:prstGeom prst="rect">
-            <a:avLst/>
-          </a:prstGeom>
-          <a:solidFill>
-            <a:srgbClr val="EA493F"/>
-          </a:solidFill>
-          <a:ln>
-            <a:solidFill/>
-          </a:ln>
-          <a:effectLst/>
-        </p:spPr>
-        <p:style>
-          <a:lnRef idx="1">
-            <a:schemeClr val="accent1"/>
-          </a:lnRef>
-          <a:fillRef idx="3">
-            <a:schemeClr val="accent1"/>
-          </a:fillRef>
-          <a:effectRef idx="2">
-            <a:schemeClr val="accent1"/>
-          </a:effectRef>
-          <a:fontRef idx="minor">
-            <a:schemeClr val="lt1"/>
-          </a:fontRef>
-        </p:style>
-        <p:txBody>
-          <a:bodyPr rtlCol="0" anchor="ctr" lIns="0" rIns="0"/>
-          <a:lstStyle/>
-          <a:p>
-            <a:pPr algn="ctr"/>
-          </a:p>
-        </p:txBody>
-      </p:sp>
-      <p:sp>
-        <p:nvSpPr>
           <p:cNvPr id="69" name="TextBox 68"/>
           <p:cNvSpPr txBox="1"/>
           <p:nvPr/>
@@ -12187,50 +11175,6 @@
       </p:sp>
       <p:sp>
         <p:nvSpPr>
-          <p:cNvPr id="71" name="Rectangle 70"/>
-          <p:cNvSpPr/>
-          <p:nvPr/>
-        </p:nvSpPr>
-        <p:spPr>
-          <a:xfrm>
-            <a:off x="6291072" y="4663440"/>
-            <a:ext cx="54864" cy="420624"/>
-          </a:xfrm>
-          <a:prstGeom prst="rect">
-            <a:avLst/>
-          </a:prstGeom>
-          <a:solidFill>
-            <a:srgbClr val="EA493F"/>
-          </a:solidFill>
-          <a:ln>
-            <a:solidFill/>
-          </a:ln>
-          <a:effectLst/>
-        </p:spPr>
-        <p:style>
-          <a:lnRef idx="1">
-            <a:schemeClr val="accent1"/>
-          </a:lnRef>
-          <a:fillRef idx="3">
-            <a:schemeClr val="accent1"/>
-          </a:fillRef>
-          <a:effectRef idx="2">
-            <a:schemeClr val="accent1"/>
-          </a:effectRef>
-          <a:fontRef idx="minor">
-            <a:schemeClr val="lt1"/>
-          </a:fontRef>
-        </p:style>
-        <p:txBody>
-          <a:bodyPr rtlCol="0" anchor="ctr" lIns="0" rIns="0"/>
-          <a:lstStyle/>
-          <a:p>
-            <a:pPr algn="ctr"/>
-          </a:p>
-        </p:txBody>
-      </p:sp>
-      <p:sp>
-        <p:nvSpPr>
           <p:cNvPr id="72" name="TextBox 71"/>
           <p:cNvSpPr txBox="1"/>
           <p:nvPr/>
@@ -12312,50 +11256,6 @@
       </p:sp>
       <p:sp>
         <p:nvSpPr>
-          <p:cNvPr id="74" name="Rectangle 73"/>
-          <p:cNvSpPr/>
-          <p:nvPr/>
-        </p:nvSpPr>
-        <p:spPr>
-          <a:xfrm>
-            <a:off x="8878824" y="4663440"/>
-            <a:ext cx="54864" cy="420624"/>
-          </a:xfrm>
-          <a:prstGeom prst="rect">
-            <a:avLst/>
-          </a:prstGeom>
-          <a:solidFill>
-            <a:srgbClr val="EA493F"/>
-          </a:solidFill>
-          <a:ln>
-            <a:solidFill/>
-          </a:ln>
-          <a:effectLst/>
-        </p:spPr>
-        <p:style>
-          <a:lnRef idx="1">
-            <a:schemeClr val="accent1"/>
-          </a:lnRef>
-          <a:fillRef idx="3">
-            <a:schemeClr val="accent1"/>
-          </a:fillRef>
-          <a:effectRef idx="2">
-            <a:schemeClr val="accent1"/>
-          </a:effectRef>
-          <a:fontRef idx="minor">
-            <a:schemeClr val="lt1"/>
-          </a:fontRef>
-        </p:style>
-        <p:txBody>
-          <a:bodyPr rtlCol="0" anchor="ctr" lIns="0" rIns="0"/>
-          <a:lstStyle/>
-          <a:p>
-            <a:pPr algn="ctr"/>
-          </a:p>
-        </p:txBody>
-      </p:sp>
-      <p:sp>
-        <p:nvSpPr>
           <p:cNvPr id="75" name="TextBox 74"/>
           <p:cNvSpPr txBox="1"/>
           <p:nvPr/>
@@ -12437,50 +11337,6 @@
       </p:sp>
       <p:sp>
         <p:nvSpPr>
-          <p:cNvPr id="77" name="Rectangle 76"/>
-          <p:cNvSpPr/>
-          <p:nvPr/>
-        </p:nvSpPr>
-        <p:spPr>
-          <a:xfrm>
-            <a:off x="6291072" y="5161788"/>
-            <a:ext cx="54864" cy="420624"/>
-          </a:xfrm>
-          <a:prstGeom prst="rect">
-            <a:avLst/>
-          </a:prstGeom>
-          <a:solidFill>
-            <a:srgbClr val="EA493F"/>
-          </a:solidFill>
-          <a:ln>
-            <a:solidFill/>
-          </a:ln>
-          <a:effectLst/>
-        </p:spPr>
-        <p:style>
-          <a:lnRef idx="1">
-            <a:schemeClr val="accent1"/>
-          </a:lnRef>
-          <a:fillRef idx="3">
-            <a:schemeClr val="accent1"/>
-          </a:fillRef>
-          <a:effectRef idx="2">
-            <a:schemeClr val="accent1"/>
-          </a:effectRef>
-          <a:fontRef idx="minor">
-            <a:schemeClr val="lt1"/>
-          </a:fontRef>
-        </p:style>
-        <p:txBody>
-          <a:bodyPr rtlCol="0" anchor="ctr" lIns="0" rIns="0"/>
-          <a:lstStyle/>
-          <a:p>
-            <a:pPr algn="ctr"/>
-          </a:p>
-        </p:txBody>
-      </p:sp>
-      <p:sp>
-        <p:nvSpPr>
           <p:cNvPr id="78" name="TextBox 77"/>
           <p:cNvSpPr txBox="1"/>
           <p:nvPr/>
@@ -12535,50 +11391,6 @@
             <a:solidFill>
               <a:srgbClr val="3A3A3A"/>
             </a:solidFill>
-          </a:ln>
-          <a:effectLst/>
-        </p:spPr>
-        <p:style>
-          <a:lnRef idx="1">
-            <a:schemeClr val="accent1"/>
-          </a:lnRef>
-          <a:fillRef idx="3">
-            <a:schemeClr val="accent1"/>
-          </a:fillRef>
-          <a:effectRef idx="2">
-            <a:schemeClr val="accent1"/>
-          </a:effectRef>
-          <a:fontRef idx="minor">
-            <a:schemeClr val="lt1"/>
-          </a:fontRef>
-        </p:style>
-        <p:txBody>
-          <a:bodyPr rtlCol="0" anchor="ctr" lIns="0" rIns="0"/>
-          <a:lstStyle/>
-          <a:p>
-            <a:pPr algn="ctr"/>
-          </a:p>
-        </p:txBody>
-      </p:sp>
-      <p:sp>
-        <p:nvSpPr>
-          <p:cNvPr id="80" name="Rectangle 79"/>
-          <p:cNvSpPr/>
-          <p:nvPr/>
-        </p:nvSpPr>
-        <p:spPr>
-          <a:xfrm>
-            <a:off x="8878824" y="5161788"/>
-            <a:ext cx="54864" cy="420624"/>
-          </a:xfrm>
-          <a:prstGeom prst="rect">
-            <a:avLst/>
-          </a:prstGeom>
-          <a:solidFill>
-            <a:srgbClr val="EA493F"/>
-          </a:solidFill>
-          <a:ln>
-            <a:solidFill/>
           </a:ln>
           <a:effectLst/>
         </p:spPr>
@@ -15981,50 +14793,6 @@
       </p:sp>
       <p:sp>
         <p:nvSpPr>
-          <p:cNvPr id="14" name="Rectangle 13"/>
-          <p:cNvSpPr/>
-          <p:nvPr/>
-        </p:nvSpPr>
-        <p:spPr>
-          <a:xfrm>
-            <a:off x="877824" y="3429000"/>
-            <a:ext cx="91440" cy="1417320"/>
-          </a:xfrm>
-          <a:prstGeom prst="rect">
-            <a:avLst/>
-          </a:prstGeom>
-          <a:solidFill>
-            <a:srgbClr val="EA493F"/>
-          </a:solidFill>
-          <a:ln>
-            <a:solidFill/>
-          </a:ln>
-          <a:effectLst/>
-        </p:spPr>
-        <p:style>
-          <a:lnRef idx="1">
-            <a:schemeClr val="accent1"/>
-          </a:lnRef>
-          <a:fillRef idx="3">
-            <a:schemeClr val="accent1"/>
-          </a:fillRef>
-          <a:effectRef idx="2">
-            <a:schemeClr val="accent1"/>
-          </a:effectRef>
-          <a:fontRef idx="minor">
-            <a:schemeClr val="lt1"/>
-          </a:fontRef>
-        </p:style>
-        <p:txBody>
-          <a:bodyPr rtlCol="0" anchor="ctr" lIns="0" rIns="0"/>
-          <a:lstStyle/>
-          <a:p>
-            <a:pPr algn="ctr"/>
-          </a:p>
-        </p:txBody>
-      </p:sp>
-      <p:sp>
-        <p:nvSpPr>
           <p:cNvPr id="15" name="TextBox 14"/>
           <p:cNvSpPr txBox="1"/>
           <p:nvPr/>
@@ -16153,50 +14921,6 @@
             <a:solidFill>
               <a:srgbClr val="3A3A3A"/>
             </a:solidFill>
-          </a:ln>
-          <a:effectLst/>
-        </p:spPr>
-        <p:style>
-          <a:lnRef idx="1">
-            <a:schemeClr val="accent1"/>
-          </a:lnRef>
-          <a:fillRef idx="3">
-            <a:schemeClr val="accent1"/>
-          </a:fillRef>
-          <a:effectRef idx="2">
-            <a:schemeClr val="accent1"/>
-          </a:effectRef>
-          <a:fontRef idx="minor">
-            <a:schemeClr val="lt1"/>
-          </a:fontRef>
-        </p:style>
-        <p:txBody>
-          <a:bodyPr rtlCol="0" anchor="ctr" lIns="0" rIns="0"/>
-          <a:lstStyle/>
-          <a:p>
-            <a:pPr algn="ctr"/>
-          </a:p>
-        </p:txBody>
-      </p:sp>
-      <p:sp>
-        <p:nvSpPr>
-          <p:cNvPr id="19" name="Rectangle 18"/>
-          <p:cNvSpPr/>
-          <p:nvPr/>
-        </p:nvSpPr>
-        <p:spPr>
-          <a:xfrm>
-            <a:off x="6291072" y="3429000"/>
-            <a:ext cx="91440" cy="1417320"/>
-          </a:xfrm>
-          <a:prstGeom prst="rect">
-            <a:avLst/>
-          </a:prstGeom>
-          <a:solidFill>
-            <a:srgbClr val="FFFFFF"/>
-          </a:solidFill>
-          <a:ln>
-            <a:solidFill/>
           </a:ln>
           <a:effectLst/>
         </p:spPr>
@@ -22189,50 +20913,6 @@
       </p:sp>
       <p:sp>
         <p:nvSpPr>
-          <p:cNvPr id="7" name="Rectangle 6"/>
-          <p:cNvSpPr/>
-          <p:nvPr/>
-        </p:nvSpPr>
-        <p:spPr>
-          <a:xfrm>
-            <a:off x="877824" y="2194560"/>
-            <a:ext cx="91440" cy="1234440"/>
-          </a:xfrm>
-          <a:prstGeom prst="rect">
-            <a:avLst/>
-          </a:prstGeom>
-          <a:solidFill>
-            <a:srgbClr val="EA493F"/>
-          </a:solidFill>
-          <a:ln>
-            <a:solidFill/>
-          </a:ln>
-          <a:effectLst/>
-        </p:spPr>
-        <p:style>
-          <a:lnRef idx="1">
-            <a:schemeClr val="accent1"/>
-          </a:lnRef>
-          <a:fillRef idx="3">
-            <a:schemeClr val="accent1"/>
-          </a:fillRef>
-          <a:effectRef idx="2">
-            <a:schemeClr val="accent1"/>
-          </a:effectRef>
-          <a:fontRef idx="minor">
-            <a:schemeClr val="lt1"/>
-          </a:fontRef>
-        </p:style>
-        <p:txBody>
-          <a:bodyPr rtlCol="0" anchor="ctr" lIns="0" rIns="0"/>
-          <a:lstStyle/>
-          <a:p>
-            <a:pPr algn="ctr"/>
-          </a:p>
-        </p:txBody>
-      </p:sp>
-      <p:sp>
-        <p:nvSpPr>
           <p:cNvPr id="8" name="TextBox 7"/>
           <p:cNvSpPr txBox="1"/>
           <p:nvPr/>
@@ -22384,50 +21064,6 @@
       </p:sp>
       <p:sp>
         <p:nvSpPr>
-          <p:cNvPr id="12" name="Rectangle 11"/>
-          <p:cNvSpPr/>
-          <p:nvPr/>
-        </p:nvSpPr>
-        <p:spPr>
-          <a:xfrm>
-            <a:off x="4480559" y="2194560"/>
-            <a:ext cx="91440" cy="1234440"/>
-          </a:xfrm>
-          <a:prstGeom prst="rect">
-            <a:avLst/>
-          </a:prstGeom>
-          <a:solidFill>
-            <a:srgbClr val="EA493F"/>
-          </a:solidFill>
-          <a:ln>
-            <a:solidFill/>
-          </a:ln>
-          <a:effectLst/>
-        </p:spPr>
-        <p:style>
-          <a:lnRef idx="1">
-            <a:schemeClr val="accent1"/>
-          </a:lnRef>
-          <a:fillRef idx="3">
-            <a:schemeClr val="accent1"/>
-          </a:fillRef>
-          <a:effectRef idx="2">
-            <a:schemeClr val="accent1"/>
-          </a:effectRef>
-          <a:fontRef idx="minor">
-            <a:schemeClr val="lt1"/>
-          </a:fontRef>
-        </p:style>
-        <p:txBody>
-          <a:bodyPr rtlCol="0" anchor="ctr" lIns="0" rIns="0"/>
-          <a:lstStyle/>
-          <a:p>
-            <a:pPr algn="ctr"/>
-          </a:p>
-        </p:txBody>
-      </p:sp>
-      <p:sp>
-        <p:nvSpPr>
           <p:cNvPr id="13" name="TextBox 12"/>
           <p:cNvSpPr txBox="1"/>
           <p:nvPr/>
@@ -22552,50 +21188,6 @@
             <a:solidFill>
               <a:srgbClr val="3A3A3A"/>
             </a:solidFill>
-          </a:ln>
-          <a:effectLst/>
-        </p:spPr>
-        <p:style>
-          <a:lnRef idx="1">
-            <a:schemeClr val="accent1"/>
-          </a:lnRef>
-          <a:fillRef idx="3">
-            <a:schemeClr val="accent1"/>
-          </a:fillRef>
-          <a:effectRef idx="2">
-            <a:schemeClr val="accent1"/>
-          </a:effectRef>
-          <a:fontRef idx="minor">
-            <a:schemeClr val="lt1"/>
-          </a:fontRef>
-        </p:style>
-        <p:txBody>
-          <a:bodyPr rtlCol="0" anchor="ctr" lIns="0" rIns="0"/>
-          <a:lstStyle/>
-          <a:p>
-            <a:pPr algn="ctr"/>
-          </a:p>
-        </p:txBody>
-      </p:sp>
-      <p:sp>
-        <p:nvSpPr>
-          <p:cNvPr id="17" name="Rectangle 16"/>
-          <p:cNvSpPr/>
-          <p:nvPr/>
-        </p:nvSpPr>
-        <p:spPr>
-          <a:xfrm>
-            <a:off x="8083296" y="2194560"/>
-            <a:ext cx="91440" cy="1234440"/>
-          </a:xfrm>
-          <a:prstGeom prst="rect">
-            <a:avLst/>
-          </a:prstGeom>
-          <a:solidFill>
-            <a:srgbClr val="EA493F"/>
-          </a:solidFill>
-          <a:ln>
-            <a:solidFill/>
           </a:ln>
           <a:effectLst/>
         </p:spPr>
@@ -23154,50 +21746,6 @@
       </p:sp>
       <p:sp>
         <p:nvSpPr>
-          <p:cNvPr id="7" name="Rectangle 6"/>
-          <p:cNvSpPr/>
-          <p:nvPr/>
-        </p:nvSpPr>
-        <p:spPr>
-          <a:xfrm>
-            <a:off x="877824" y="2157984"/>
-            <a:ext cx="91440" cy="1024128"/>
-          </a:xfrm>
-          <a:prstGeom prst="rect">
-            <a:avLst/>
-          </a:prstGeom>
-          <a:solidFill>
-            <a:srgbClr val="EA493F"/>
-          </a:solidFill>
-          <a:ln>
-            <a:solidFill/>
-          </a:ln>
-          <a:effectLst/>
-        </p:spPr>
-        <p:style>
-          <a:lnRef idx="1">
-            <a:schemeClr val="accent1"/>
-          </a:lnRef>
-          <a:fillRef idx="3">
-            <a:schemeClr val="accent1"/>
-          </a:fillRef>
-          <a:effectRef idx="2">
-            <a:schemeClr val="accent1"/>
-          </a:effectRef>
-          <a:fontRef idx="minor">
-            <a:schemeClr val="lt1"/>
-          </a:fontRef>
-        </p:style>
-        <p:txBody>
-          <a:bodyPr rtlCol="0" anchor="ctr" lIns="0" rIns="0"/>
-          <a:lstStyle/>
-          <a:p>
-            <a:pPr algn="ctr"/>
-          </a:p>
-        </p:txBody>
-      </p:sp>
-      <p:sp>
-        <p:nvSpPr>
           <p:cNvPr id="8" name="TextBox 7"/>
           <p:cNvSpPr txBox="1"/>
           <p:nvPr/>
@@ -23349,50 +21897,6 @@
       </p:sp>
       <p:sp>
         <p:nvSpPr>
-          <p:cNvPr id="12" name="Rectangle 11"/>
-          <p:cNvSpPr/>
-          <p:nvPr/>
-        </p:nvSpPr>
-        <p:spPr>
-          <a:xfrm>
-            <a:off x="4480559" y="2157984"/>
-            <a:ext cx="91440" cy="1024128"/>
-          </a:xfrm>
-          <a:prstGeom prst="rect">
-            <a:avLst/>
-          </a:prstGeom>
-          <a:solidFill>
-            <a:srgbClr val="EA493F"/>
-          </a:solidFill>
-          <a:ln>
-            <a:solidFill/>
-          </a:ln>
-          <a:effectLst/>
-        </p:spPr>
-        <p:style>
-          <a:lnRef idx="1">
-            <a:schemeClr val="accent1"/>
-          </a:lnRef>
-          <a:fillRef idx="3">
-            <a:schemeClr val="accent1"/>
-          </a:fillRef>
-          <a:effectRef idx="2">
-            <a:schemeClr val="accent1"/>
-          </a:effectRef>
-          <a:fontRef idx="minor">
-            <a:schemeClr val="lt1"/>
-          </a:fontRef>
-        </p:style>
-        <p:txBody>
-          <a:bodyPr rtlCol="0" anchor="ctr" lIns="0" rIns="0"/>
-          <a:lstStyle/>
-          <a:p>
-            <a:pPr algn="ctr"/>
-          </a:p>
-        </p:txBody>
-      </p:sp>
-      <p:sp>
-        <p:nvSpPr>
           <p:cNvPr id="13" name="TextBox 12"/>
           <p:cNvSpPr txBox="1"/>
           <p:nvPr/>
@@ -23517,50 +22021,6 @@
             <a:solidFill>
               <a:srgbClr val="3A3A3A"/>
             </a:solidFill>
-          </a:ln>
-          <a:effectLst/>
-        </p:spPr>
-        <p:style>
-          <a:lnRef idx="1">
-            <a:schemeClr val="accent1"/>
-          </a:lnRef>
-          <a:fillRef idx="3">
-            <a:schemeClr val="accent1"/>
-          </a:fillRef>
-          <a:effectRef idx="2">
-            <a:schemeClr val="accent1"/>
-          </a:effectRef>
-          <a:fontRef idx="minor">
-            <a:schemeClr val="lt1"/>
-          </a:fontRef>
-        </p:style>
-        <p:txBody>
-          <a:bodyPr rtlCol="0" anchor="ctr" lIns="0" rIns="0"/>
-          <a:lstStyle/>
-          <a:p>
-            <a:pPr algn="ctr"/>
-          </a:p>
-        </p:txBody>
-      </p:sp>
-      <p:sp>
-        <p:nvSpPr>
-          <p:cNvPr id="17" name="Rectangle 16"/>
-          <p:cNvSpPr/>
-          <p:nvPr/>
-        </p:nvSpPr>
-        <p:spPr>
-          <a:xfrm>
-            <a:off x="8083296" y="2157984"/>
-            <a:ext cx="91440" cy="1024128"/>
-          </a:xfrm>
-          <a:prstGeom prst="rect">
-            <a:avLst/>
-          </a:prstGeom>
-          <a:solidFill>
-            <a:srgbClr val="EA493F"/>
-          </a:solidFill>
-          <a:ln>
-            <a:solidFill/>
           </a:ln>
           <a:effectLst/>
         </p:spPr>
@@ -37361,50 +35821,6 @@
       </p:sp>
       <p:sp>
         <p:nvSpPr>
-          <p:cNvPr id="7" name="Rectangle 6"/>
-          <p:cNvSpPr/>
-          <p:nvPr/>
-        </p:nvSpPr>
-        <p:spPr>
-          <a:xfrm>
-            <a:off x="877824" y="2121408"/>
-            <a:ext cx="91440" cy="1627632"/>
-          </a:xfrm>
-          <a:prstGeom prst="rect">
-            <a:avLst/>
-          </a:prstGeom>
-          <a:solidFill>
-            <a:srgbClr val="EA493F"/>
-          </a:solidFill>
-          <a:ln>
-            <a:solidFill/>
-          </a:ln>
-          <a:effectLst/>
-        </p:spPr>
-        <p:style>
-          <a:lnRef idx="1">
-            <a:schemeClr val="accent1"/>
-          </a:lnRef>
-          <a:fillRef idx="3">
-            <a:schemeClr val="accent1"/>
-          </a:fillRef>
-          <a:effectRef idx="2">
-            <a:schemeClr val="accent1"/>
-          </a:effectRef>
-          <a:fontRef idx="minor">
-            <a:schemeClr val="lt1"/>
-          </a:fontRef>
-        </p:style>
-        <p:txBody>
-          <a:bodyPr rtlCol="0" anchor="ctr" lIns="0" rIns="0"/>
-          <a:lstStyle/>
-          <a:p>
-            <a:pPr algn="ctr"/>
-          </a:p>
-        </p:txBody>
-      </p:sp>
-      <p:sp>
-        <p:nvSpPr>
           <p:cNvPr id="8" name="TextBox 7"/>
           <p:cNvSpPr txBox="1"/>
           <p:nvPr/>
@@ -37533,50 +35949,6 @@
             <a:solidFill>
               <a:srgbClr val="3A3A3A"/>
             </a:solidFill>
-          </a:ln>
-          <a:effectLst/>
-        </p:spPr>
-        <p:style>
-          <a:lnRef idx="1">
-            <a:schemeClr val="accent1"/>
-          </a:lnRef>
-          <a:fillRef idx="3">
-            <a:schemeClr val="accent1"/>
-          </a:fillRef>
-          <a:effectRef idx="2">
-            <a:schemeClr val="accent1"/>
-          </a:effectRef>
-          <a:fontRef idx="minor">
-            <a:schemeClr val="lt1"/>
-          </a:fontRef>
-        </p:style>
-        <p:txBody>
-          <a:bodyPr rtlCol="0" anchor="ctr" lIns="0" rIns="0"/>
-          <a:lstStyle/>
-          <a:p>
-            <a:pPr algn="ctr"/>
-          </a:p>
-        </p:txBody>
-      </p:sp>
-      <p:sp>
-        <p:nvSpPr>
-          <p:cNvPr id="12" name="Rectangle 11"/>
-          <p:cNvSpPr/>
-          <p:nvPr/>
-        </p:nvSpPr>
-        <p:spPr>
-          <a:xfrm>
-            <a:off x="6291072" y="2121408"/>
-            <a:ext cx="91440" cy="1627632"/>
-          </a:xfrm>
-          <a:prstGeom prst="rect">
-            <a:avLst/>
-          </a:prstGeom>
-          <a:solidFill>
-            <a:srgbClr val="FFFFFF"/>
-          </a:solidFill>
-          <a:ln>
-            <a:solidFill/>
           </a:ln>
           <a:effectLst/>
         </p:spPr>
